--- a/data/input/templates/pptx_template.vis_10.test.pptx
+++ b/data/input/templates/pptx_template.vis_10.test.pptx
@@ -243,7 +243,7 @@
           <a:p>
             <a:fld id="{DC6821C8-422F-4CA2-85E1-19A6D027F030}" type="datetimeFigureOut">
               <a:rPr lang="en-US" smtClean="0"/>
-              <a:t>8/19/2026</a:t>
+              <a:t>8/24/2026</a:t>
             </a:fld>
             <a:endParaRPr lang="en-US"/>
           </a:p>
@@ -431,7 +431,7 @@
             <a:fld id="{68D86595-6E20-4226-9E0D-B3822373F9DE}" type="datetimeFigureOut">
               <a:rPr lang="en-US" smtClean="0"/>
               <a:pPr/>
-              <a:t>8/19/2026</a:t>
+              <a:t>8/24/2026</a:t>
             </a:fld>
             <a:endParaRPr lang="en-US"/>
           </a:p>
@@ -11861,7 +11861,7 @@
             </a:extLst>
           </p:cNvPr>
           <p:cNvPicPr>
-            <a:picLocks noChangeAspect="1"/>
+            <a:picLocks/>
           </p:cNvPicPr>
           <p:nvPr/>
         </p:nvPicPr>
@@ -11879,8 +11879,8 @@
         </p:blipFill>
         <p:spPr>
           <a:xfrm>
-            <a:off x="9236978" y="5373242"/>
-            <a:ext cx="2627381" cy="969266"/>
+            <a:off x="9277363" y="5028686"/>
+            <a:ext cx="2726522" cy="1371600"/>
           </a:xfrm>
           <a:prstGeom prst="rect">
             <a:avLst/>
@@ -13073,15 +13073,6 @@
 </file>
 
 <file path=customXml/item2.xml><?xml version="1.0" encoding="utf-8"?>
-<?mso-contentType ?>
-<FormTemplates xmlns="http://schemas.microsoft.com/sharepoint/v3/contenttype/forms">
-  <Display>DocumentLibraryForm</Display>
-  <Edit>DocumentLibraryForm</Edit>
-  <New>DocumentLibraryForm</New>
-</FormTemplates>
-</file>
-
-<file path=customXml/item3.xml><?xml version="1.0" encoding="utf-8"?>
 <p:properties xmlns:p="http://schemas.microsoft.com/office/2006/metadata/properties" xmlns:xsi="http://www.w3.org/2001/XMLSchema-instance" xmlns:pc="http://schemas.microsoft.com/office/infopath/2007/PartnerControls">
   <documentManagement>
     <lcf76f155ced4ddcb4097134ff3c332f xmlns="05b33221-363d-4d44-afe3-1e10ae3da870">
@@ -13092,6 +13083,15 @@
     <_ip_UnifiedCompliancePolicyProperties xmlns="http://schemas.microsoft.com/sharepoint/v3" xsi:nil="true"/>
   </documentManagement>
 </p:properties>
+</file>
+
+<file path=customXml/item3.xml><?xml version="1.0" encoding="utf-8"?>
+<?mso-contentType ?>
+<FormTemplates xmlns="http://schemas.microsoft.com/sharepoint/v3/contenttype/forms">
+  <Display>DocumentLibraryForm</Display>
+  <Edit>DocumentLibraryForm</Edit>
+  <New>DocumentLibraryForm</New>
+</FormTemplates>
 </file>
 
 <file path=customXml/itemProps1.xml><?xml version="1.0" encoding="utf-8"?>
@@ -13115,14 +13115,6 @@
 </file>
 
 <file path=customXml/itemProps2.xml><?xml version="1.0" encoding="utf-8"?>
-<ds:datastoreItem xmlns:ds="http://schemas.openxmlformats.org/officeDocument/2006/customXml" ds:itemID="{2A1CCD50-0B2F-4685-A6F7-F328002129B4}">
-  <ds:schemaRefs>
-    <ds:schemaRef ds:uri="http://schemas.microsoft.com/sharepoint/v3/contenttype/forms"/>
-  </ds:schemaRefs>
-</ds:datastoreItem>
-</file>
-
-<file path=customXml/itemProps3.xml><?xml version="1.0" encoding="utf-8"?>
 <ds:datastoreItem xmlns:ds="http://schemas.openxmlformats.org/officeDocument/2006/customXml" ds:itemID="{49FE8081-5A08-4CEC-98F7-B9DDB3604F60}">
   <ds:schemaRefs>
     <ds:schemaRef ds:uri="05b33221-363d-4d44-afe3-1e10ae3da870"/>
@@ -13140,6 +13132,14 @@
 </ds:datastoreItem>
 </file>
 
+<file path=customXml/itemProps3.xml><?xml version="1.0" encoding="utf-8"?>
+<ds:datastoreItem xmlns:ds="http://schemas.openxmlformats.org/officeDocument/2006/customXml" ds:itemID="{2A1CCD50-0B2F-4685-A6F7-F328002129B4}">
+  <ds:schemaRefs>
+    <ds:schemaRef ds:uri="http://schemas.microsoft.com/sharepoint/v3/contenttype/forms"/>
+  </ds:schemaRefs>
+</ds:datastoreItem>
+</file>
+
 <file path=docMetadata/LabelInfo.xml><?xml version="1.0" encoding="utf-8"?>
 <clbl:labelList xmlns:clbl="http://schemas.microsoft.com/office/2020/mipLabelMetadata">
   <clbl:label id="{5563d9c4-1af6-4d5e-894d-8f5a4315f709}" enabled="1" method="Privileged" siteId="{3667e201-cbdc-48b3-9b42-5d2d3f16e2a9}" removed="0"/>

--- a/data/input/templates/pptx_template.vis_10.test.pptx
+++ b/data/input/templates/pptx_template.vis_10.test.pptx
@@ -243,7 +243,7 @@
           <a:p>
             <a:fld id="{DC6821C8-422F-4CA2-85E1-19A6D027F030}" type="datetimeFigureOut">
               <a:rPr lang="en-US" smtClean="0"/>
-              <a:t>8/24/2026</a:t>
+              <a:t>8/26/2026</a:t>
             </a:fld>
             <a:endParaRPr lang="en-US"/>
           </a:p>
@@ -431,7 +431,7 @@
             <a:fld id="{68D86595-6E20-4226-9E0D-B3822373F9DE}" type="datetimeFigureOut">
               <a:rPr lang="en-US" smtClean="0"/>
               <a:pPr/>
-              <a:t>8/24/2026</a:t>
+              <a:t>8/26/2026</a:t>
             </a:fld>
             <a:endParaRPr lang="en-US"/>
           </a:p>
@@ -11853,7 +11853,7 @@
       </p:sp>
       <p:pic>
         <p:nvPicPr>
-          <p:cNvPr id="38" name="vis_legend">
+          <p:cNvPr id="38" name="vis_10_legend">
             <a:extLst>
               <a:ext uri="{FF2B5EF4-FFF2-40B4-BE49-F238E27FC236}">
                 <a16:creationId xmlns:a16="http://schemas.microsoft.com/office/drawing/2014/main" id="{4E862CCE-3420-FE69-4CCE-959354D44DAD}"/>
@@ -11889,7 +11889,7 @@
       </p:pic>
       <p:pic>
         <p:nvPicPr>
-          <p:cNvPr id="40" name="vis_image">
+          <p:cNvPr id="40" name="vis_10_image">
             <a:extLst>
               <a:ext uri="{FF2B5EF4-FFF2-40B4-BE49-F238E27FC236}">
                 <a16:creationId xmlns:a16="http://schemas.microsoft.com/office/drawing/2014/main" id="{AD196D3E-2754-F03A-016F-111F7B3EE73F}"/>
@@ -11925,7 +11925,7 @@
       </p:pic>
       <p:pic>
         <p:nvPicPr>
-          <p:cNvPr id="44" name="vis_tbl01">
+          <p:cNvPr id="44" name="vis_10_tbl01">
             <a:extLst>
               <a:ext uri="{FF2B5EF4-FFF2-40B4-BE49-F238E27FC236}">
                 <a16:creationId xmlns:a16="http://schemas.microsoft.com/office/drawing/2014/main" id="{67461234-A206-B486-EBE3-9F62F6B2B2A3}"/>
@@ -11961,7 +11961,7 @@
       </p:pic>
       <p:pic>
         <p:nvPicPr>
-          <p:cNvPr id="3" name="vis_title" descr="vis_08_title__adf_classified_minimum__2020-04-01_00-00-00_to_2026-02-28_23-59-59_999999.png">
+          <p:cNvPr id="3" name="vis_10_title" descr="vis_08_title__adf_classified_minimum__2020-04-01_00-00-00_to_2026-02-28_23-59-59_999999.png">
             <a:extLst>
               <a:ext uri="{FF2B5EF4-FFF2-40B4-BE49-F238E27FC236}">
                 <a16:creationId xmlns:a16="http://schemas.microsoft.com/office/drawing/2014/main" id="{0A9F498D-BC45-573F-1131-B4D37BDD2A39}"/>
@@ -13073,6 +13073,15 @@
 </file>
 
 <file path=customXml/item2.xml><?xml version="1.0" encoding="utf-8"?>
+<?mso-contentType ?>
+<FormTemplates xmlns="http://schemas.microsoft.com/sharepoint/v3/contenttype/forms">
+  <Display>DocumentLibraryForm</Display>
+  <Edit>DocumentLibraryForm</Edit>
+  <New>DocumentLibraryForm</New>
+</FormTemplates>
+</file>
+
+<file path=customXml/item3.xml><?xml version="1.0" encoding="utf-8"?>
 <p:properties xmlns:p="http://schemas.microsoft.com/office/2006/metadata/properties" xmlns:xsi="http://www.w3.org/2001/XMLSchema-instance" xmlns:pc="http://schemas.microsoft.com/office/infopath/2007/PartnerControls">
   <documentManagement>
     <lcf76f155ced4ddcb4097134ff3c332f xmlns="05b33221-363d-4d44-afe3-1e10ae3da870">
@@ -13083,15 +13092,6 @@
     <_ip_UnifiedCompliancePolicyProperties xmlns="http://schemas.microsoft.com/sharepoint/v3" xsi:nil="true"/>
   </documentManagement>
 </p:properties>
-</file>
-
-<file path=customXml/item3.xml><?xml version="1.0" encoding="utf-8"?>
-<?mso-contentType ?>
-<FormTemplates xmlns="http://schemas.microsoft.com/sharepoint/v3/contenttype/forms">
-  <Display>DocumentLibraryForm</Display>
-  <Edit>DocumentLibraryForm</Edit>
-  <New>DocumentLibraryForm</New>
-</FormTemplates>
 </file>
 
 <file path=customXml/itemProps1.xml><?xml version="1.0" encoding="utf-8"?>
@@ -13115,6 +13115,14 @@
 </file>
 
 <file path=customXml/itemProps2.xml><?xml version="1.0" encoding="utf-8"?>
+<ds:datastoreItem xmlns:ds="http://schemas.openxmlformats.org/officeDocument/2006/customXml" ds:itemID="{2A1CCD50-0B2F-4685-A6F7-F328002129B4}">
+  <ds:schemaRefs>
+    <ds:schemaRef ds:uri="http://schemas.microsoft.com/sharepoint/v3/contenttype/forms"/>
+  </ds:schemaRefs>
+</ds:datastoreItem>
+</file>
+
+<file path=customXml/itemProps3.xml><?xml version="1.0" encoding="utf-8"?>
 <ds:datastoreItem xmlns:ds="http://schemas.openxmlformats.org/officeDocument/2006/customXml" ds:itemID="{49FE8081-5A08-4CEC-98F7-B9DDB3604F60}">
   <ds:schemaRefs>
     <ds:schemaRef ds:uri="05b33221-363d-4d44-afe3-1e10ae3da870"/>
@@ -13132,14 +13140,6 @@
 </ds:datastoreItem>
 </file>
 
-<file path=customXml/itemProps3.xml><?xml version="1.0" encoding="utf-8"?>
-<ds:datastoreItem xmlns:ds="http://schemas.openxmlformats.org/officeDocument/2006/customXml" ds:itemID="{2A1CCD50-0B2F-4685-A6F7-F328002129B4}">
-  <ds:schemaRefs>
-    <ds:schemaRef ds:uri="http://schemas.microsoft.com/sharepoint/v3/contenttype/forms"/>
-  </ds:schemaRefs>
-</ds:datastoreItem>
-</file>
-
 <file path=docMetadata/LabelInfo.xml><?xml version="1.0" encoding="utf-8"?>
 <clbl:labelList xmlns:clbl="http://schemas.microsoft.com/office/2020/mipLabelMetadata">
   <clbl:label id="{5563d9c4-1af6-4d5e-894d-8f5a4315f709}" enabled="1" method="Privileged" siteId="{3667e201-cbdc-48b3-9b42-5d2d3f16e2a9}" removed="0"/>

--- a/data/input/templates/pptx_template.vis_10.test.pptx
+++ b/data/input/templates/pptx_template.vis_10.test.pptx
@@ -243,7 +243,7 @@
           <a:p>
             <a:fld id="{DC6821C8-422F-4CA2-85E1-19A6D027F030}" type="datetimeFigureOut">
               <a:rPr lang="en-US" smtClean="0"/>
-              <a:t>8/26/2026</a:t>
+              <a:t>8/28/2026</a:t>
             </a:fld>
             <a:endParaRPr lang="en-US"/>
           </a:p>
@@ -431,7 +431,7 @@
             <a:fld id="{68D86595-6E20-4226-9E0D-B3822373F9DE}" type="datetimeFigureOut">
               <a:rPr lang="en-US" smtClean="0"/>
               <a:pPr/>
-              <a:t>8/26/2026</a:t>
+              <a:t>8/28/2026</a:t>
             </a:fld>
             <a:endParaRPr lang="en-US"/>
           </a:p>
@@ -11897,7 +11897,7 @@
             </a:extLst>
           </p:cNvPr>
           <p:cNvPicPr>
-            <a:picLocks noChangeAspect="1"/>
+            <a:picLocks/>
           </p:cNvPicPr>
           <p:nvPr/>
         </p:nvPicPr>
@@ -11915,44 +11915,8 @@
         </p:blipFill>
         <p:spPr>
           <a:xfrm>
-            <a:off x="140203" y="1371589"/>
-            <a:ext cx="9144019" cy="5486411"/>
-          </a:xfrm>
-          <a:prstGeom prst="rect">
-            <a:avLst/>
-          </a:prstGeom>
-        </p:spPr>
-      </p:pic>
-      <p:pic>
-        <p:nvPicPr>
-          <p:cNvPr id="44" name="vis_10_tbl01">
-            <a:extLst>
-              <a:ext uri="{FF2B5EF4-FFF2-40B4-BE49-F238E27FC236}">
-                <a16:creationId xmlns:a16="http://schemas.microsoft.com/office/drawing/2014/main" id="{67461234-A206-B486-EBE3-9F62F6B2B2A3}"/>
-              </a:ext>
-            </a:extLst>
-          </p:cNvPr>
-          <p:cNvPicPr>
-            <a:picLocks noChangeAspect="1"/>
-          </p:cNvPicPr>
-          <p:nvPr/>
-        </p:nvPicPr>
-        <p:blipFill>
-          <a:blip r:embed="rId6" cstate="print">
-            <a:extLst>
-              <a:ext uri="{28A0092B-C50C-407E-A947-70E740481C1C}">
-                <a14:useLocalDpi xmlns:a14="http://schemas.microsoft.com/office/drawing/2010/main" val="0"/>
-              </a:ext>
-            </a:extLst>
-          </a:blip>
-          <a:stretch>
-            <a:fillRect/>
-          </a:stretch>
-        </p:blipFill>
-        <p:spPr>
-          <a:xfrm>
-            <a:off x="9220213" y="1294014"/>
-            <a:ext cx="2596901" cy="1100330"/>
+            <a:off x="0" y="1316736"/>
+            <a:ext cx="9692640" cy="5486400"/>
           </a:xfrm>
           <a:prstGeom prst="rect">
             <a:avLst/>
@@ -11969,20 +11933,56 @@
             </a:extLst>
           </p:cNvPr>
           <p:cNvPicPr>
+            <a:picLocks/>
+          </p:cNvPicPr>
+          <p:nvPr/>
+        </p:nvPicPr>
+        <p:blipFill>
+          <a:blip r:embed="rId6"/>
+          <a:stretch>
+            <a:fillRect/>
+          </a:stretch>
+        </p:blipFill>
+        <p:spPr>
+          <a:xfrm>
+            <a:off x="3023" y="1000506"/>
+            <a:ext cx="12188977" cy="274320"/>
+          </a:xfrm>
+          <a:prstGeom prst="rect">
+            <a:avLst/>
+          </a:prstGeom>
+        </p:spPr>
+      </p:pic>
+      <p:pic>
+        <p:nvPicPr>
+          <p:cNvPr id="10" name="vis_10_tbl01">
+            <a:extLst>
+              <a:ext uri="{FF2B5EF4-FFF2-40B4-BE49-F238E27FC236}">
+                <a16:creationId xmlns:a16="http://schemas.microsoft.com/office/drawing/2014/main" id="{5F95110D-3E46-ED52-424B-5001B85434F2}"/>
+              </a:ext>
+            </a:extLst>
+          </p:cNvPr>
+          <p:cNvPicPr>
             <a:picLocks noChangeAspect="1"/>
           </p:cNvPicPr>
           <p:nvPr/>
         </p:nvPicPr>
         <p:blipFill>
-          <a:blip r:embed="rId7"/>
+          <a:blip r:embed="rId7" cstate="print">
+            <a:extLst>
+              <a:ext uri="{28A0092B-C50C-407E-A947-70E740481C1C}">
+                <a14:useLocalDpi xmlns:a14="http://schemas.microsoft.com/office/drawing/2010/main" val="0"/>
+              </a:ext>
+            </a:extLst>
+          </a:blip>
           <a:stretch>
             <a:fillRect/>
           </a:stretch>
         </p:blipFill>
         <p:spPr>
           <a:xfrm>
-            <a:off x="3023" y="1000506"/>
-            <a:ext cx="12188977" cy="228600"/>
+            <a:off x="9674349" y="1331503"/>
+            <a:ext cx="2292101" cy="600457"/>
           </a:xfrm>
           <a:prstGeom prst="rect">
             <a:avLst/>
